--- a/lectures/BalancedBST_RBTrees_Gist.pptx
+++ b/lectures/BalancedBST_RBTrees_Gist.pptx
@@ -984,7 +984,8 @@
           <a:lstStyle/>
           <a:p>
             <a:r>
-              <a:t>Give the class a minute before revealing the answer (consider adding an Appear animation to the answer card). Invariant 2 makes node 2 black. The root-NULL path that goes left from 2 contains exactly one black node, the root itself. By invariant 4 the long path 2, 5, 7, NULL must also contain exactly one black node, so 5 and 7 are both red, which breaks invariant 3. Moral: the invariants outlaw long, skinny chains. The next two slides make that precise.</a:t>
+              <a:rPr dirty="0"/>
+              <a:t>Invariant 2 makes node 2 black. The root-NULL path that goes left from 2 contains exactly one black node, the root itself. By invariant 4 the long path 2, 5, 7, NULL must also contain exactly one black node, so 5 and 7 are both red, which breaks invariant 3. Moral: the invariants outlaw long, skinny chains. The next two slides make that precise.</a:t>
             </a:r>
           </a:p>
         </p:txBody>
@@ -1405,6 +1406,7 @@
           <a:lstStyle/>
           <a:p>
             <a:r>
+              <a:rPr dirty="0"/>
               <a:t>Why color the new node red? Coloring it black would add a black node to some root-NULL paths but not others, breaking invariant 4 globally. Red can only cause a local problem: a red parent. Since the parent p is red and the root is black, p is not the root, so the grandparent g exists and is black. Name the cast: x is the new node, p its parent, g its grandparent, u its uncle (p's sibling). The repair depends only on the color of u.</a:t>
             </a:r>
           </a:p>
@@ -1475,6 +1477,7 @@
           <a:lstStyle/>
           <a:p>
             <a:r>
+              <a:rPr dirty="0"/>
               <a:t>Case 1: p and u are both red, so g must be black. Push g's blackness down one level: p and u become black, g becomes red. Every path through g still meets exactly one black node among g, p, u, so black counts are unchanged and invariant 4 holds. The violation at x is gone, but g is now red and its own parent might be red, so the same situation can reappear two levels up: set x = g and repeat. Each round is O(1) and climbs two levels, so at most O(log n) rounds. If g is the root, color it black, which adds one black to every path equally.</a:t>
             </a:r>
           </a:p>
@@ -1545,6 +1548,7 @@
           <a:lstStyle/>
           <a:p>
             <a:r>
+              <a:rPr dirty="0"/>
               <a:t>Case 2: the uncle is black (a NULL uncle counts as black). Recoloring alone cannot work, so we use last lecture's rotations, with the same line versus zig-zag distinction. Line case (x is a left child of a left child, or right of right): rotate at g so p moves up, then make p black and g red. Every path that went through black g now goes through black p instead, so black counts are preserved, and no red-red pair is left. The fix-up stops. Zig-zag case: first rotate at p to turn it into the line case. So an insertion performs at most 2 rotations in total. Mirror-image cases are symmetric.</a:t>
             </a:r>
           </a:p>
@@ -1685,15 +1689,16 @@
           <a:lstStyle/>
           <a:p>
             <a:r>
+              <a:rPr dirty="0"/>
               <a:t>Run RB-Insert by hand on our running example A = 20, 13, 25, 2, 17, 8, 5, 7. Insert 20: root, black. 13 and 25: red children of a black node, no violation. Insert 2: red child of red 13. Its uncle 25 is red, so Case 1: 13 and 25 become black, 20 red; 20 is the root, so recolor it black. Insert 17: red child of black 13, fine. Ask students to predict each case before revealing the next panel.</a:t>
             </a:r>
           </a:p>
           <a:p>
-            <a:endParaRPr lang="en-US"/>
-          </a:p>
-          <a:p>
-            <a:r>
-              <a:rPr lang="en-US"/>
+            <a:endParaRPr lang="en-US" dirty="0"/>
+          </a:p>
+          <a:p>
+            <a:r>
+              <a:rPr lang="en-US" dirty="0"/>
               <a:t>These panels are intermediate insertion stages, not the completed eight-key RB tree. The root is correctly 20 at this stage. The final repair after inserting 7 on slide 21 promotes 13 to the root.</a:t>
             </a:r>
           </a:p>

--- a/lectures/BalancedBST_RBTrees_Gist.pptx
+++ b/lectures/BalancedBST_RBTrees_Gist.pptx
@@ -3047,7 +3047,7 @@
           <a:p>
             <a:fld id="{001FA32C-0516-594B-A3A9-E4A9F22AFA08}" type="datetimeFigureOut">
               <a:rPr lang="en-US" smtClean="0"/>
-              <a:t>10/13/26</a:t>
+              <a:t>10/14/26</a:t>
             </a:fld>
             <a:endParaRPr lang="en-US"/>
           </a:p>
@@ -3245,7 +3245,7 @@
           <a:p>
             <a:fld id="{001FA32C-0516-594B-A3A9-E4A9F22AFA08}" type="datetimeFigureOut">
               <a:rPr lang="en-US" smtClean="0"/>
-              <a:t>10/13/26</a:t>
+              <a:t>10/14/26</a:t>
             </a:fld>
             <a:endParaRPr lang="en-US"/>
           </a:p>
@@ -3453,7 +3453,7 @@
           <a:p>
             <a:fld id="{001FA32C-0516-594B-A3A9-E4A9F22AFA08}" type="datetimeFigureOut">
               <a:rPr lang="en-US" smtClean="0"/>
-              <a:t>10/13/26</a:t>
+              <a:t>10/14/26</a:t>
             </a:fld>
             <a:endParaRPr lang="en-US"/>
           </a:p>
@@ -3686,7 +3686,7 @@
           <a:p>
             <a:fld id="{001FA32C-0516-594B-A3A9-E4A9F22AFA08}" type="datetimeFigureOut">
               <a:rPr lang="en-US" smtClean="0"/>
-              <a:t>10/13/26</a:t>
+              <a:t>10/14/26</a:t>
             </a:fld>
             <a:endParaRPr lang="en-US"/>
           </a:p>
@@ -3961,7 +3961,7 @@
           <a:p>
             <a:fld id="{001FA32C-0516-594B-A3A9-E4A9F22AFA08}" type="datetimeFigureOut">
               <a:rPr lang="en-US" smtClean="0"/>
-              <a:t>10/13/26</a:t>
+              <a:t>10/14/26</a:t>
             </a:fld>
             <a:endParaRPr lang="en-US"/>
           </a:p>
@@ -4226,7 +4226,7 @@
           <a:p>
             <a:fld id="{001FA32C-0516-594B-A3A9-E4A9F22AFA08}" type="datetimeFigureOut">
               <a:rPr lang="en-US" smtClean="0"/>
-              <a:t>10/13/26</a:t>
+              <a:t>10/14/26</a:t>
             </a:fld>
             <a:endParaRPr lang="en-US"/>
           </a:p>
@@ -4638,7 +4638,7 @@
           <a:p>
             <a:fld id="{001FA32C-0516-594B-A3A9-E4A9F22AFA08}" type="datetimeFigureOut">
               <a:rPr lang="en-US" smtClean="0"/>
-              <a:t>10/13/26</a:t>
+              <a:t>10/14/26</a:t>
             </a:fld>
             <a:endParaRPr lang="en-US"/>
           </a:p>
@@ -4779,7 +4779,7 @@
           <a:p>
             <a:fld id="{001FA32C-0516-594B-A3A9-E4A9F22AFA08}" type="datetimeFigureOut">
               <a:rPr lang="en-US" smtClean="0"/>
-              <a:t>10/13/26</a:t>
+              <a:t>10/14/26</a:t>
             </a:fld>
             <a:endParaRPr lang="en-US"/>
           </a:p>
@@ -4892,7 +4892,7 @@
           <a:p>
             <a:fld id="{001FA32C-0516-594B-A3A9-E4A9F22AFA08}" type="datetimeFigureOut">
               <a:rPr lang="en-US" smtClean="0"/>
-              <a:t>10/13/26</a:t>
+              <a:t>10/14/26</a:t>
             </a:fld>
             <a:endParaRPr lang="en-US"/>
           </a:p>
@@ -5203,7 +5203,7 @@
           <a:p>
             <a:fld id="{001FA32C-0516-594B-A3A9-E4A9F22AFA08}" type="datetimeFigureOut">
               <a:rPr lang="en-US" smtClean="0"/>
-              <a:t>10/13/26</a:t>
+              <a:t>10/14/26</a:t>
             </a:fld>
             <a:endParaRPr lang="en-US"/>
           </a:p>
@@ -5491,7 +5491,7 @@
           <a:p>
             <a:fld id="{001FA32C-0516-594B-A3A9-E4A9F22AFA08}" type="datetimeFigureOut">
               <a:rPr lang="en-US" smtClean="0"/>
-              <a:t>10/13/26</a:t>
+              <a:t>10/14/26</a:t>
             </a:fld>
             <a:endParaRPr lang="en-US"/>
           </a:p>
@@ -5732,7 +5732,7 @@
           <a:p>
             <a:fld id="{001FA32C-0516-594B-A3A9-E4A9F22AFA08}" type="datetimeFigureOut">
               <a:rPr lang="en-US" smtClean="0"/>
-              <a:t>10/13/26</a:t>
+              <a:t>10/14/26</a:t>
             </a:fld>
             <a:endParaRPr lang="en-US"/>
           </a:p>
@@ -38515,7 +38515,7 @@
         </p:nvSpPr>
         <p:spPr>
           <a:xfrm>
-            <a:off x="548640" y="5623560"/>
+            <a:off x="548640" y="5524500"/>
             <a:ext cx="3657600" cy="320040"/>
           </a:xfrm>
           <a:prstGeom prst="rect">
@@ -38531,7 +38531,7 @@
           <a:p>
             <a:pPr algn="l"/>
             <a:r>
-              <a:rPr sz="1200" b="1" i="0">
+              <a:rPr sz="1200" b="1" i="0" dirty="0">
                 <a:solidFill>
                   <a:srgbClr val="4472C4"/>
                 </a:solidFill>
@@ -38550,8 +38550,8 @@
         </p:nvSpPr>
         <p:spPr>
           <a:xfrm>
-            <a:off x="548640" y="5943600"/>
-            <a:ext cx="11064240" cy="200055"/>
+            <a:off x="548639" y="5763283"/>
+            <a:ext cx="11064240" cy="615553"/>
           </a:xfrm>
           <a:prstGeom prst="rect">
             <a:avLst/>
@@ -38563,6 +38563,37 @@
             <a:spAutoFit/>
           </a:bodyPr>
           <a:lstStyle/>
+          <a:p>
+            <a:r>
+              <a:rPr lang="en-US" sz="1300" b="0" i="0" dirty="0">
+                <a:solidFill>
+                  <a:srgbClr val="595959"/>
+                </a:solidFill>
+                <a:latin typeface="Calibri"/>
+              </a:rPr>
+              <a:t>Practic</a:t>
+            </a:r>
+            <a:r>
+              <a:rPr lang="en-US" sz="1300" dirty="0">
+                <a:solidFill>
+                  <a:srgbClr val="595959"/>
+                </a:solidFill>
+                <a:latin typeface="Calibri"/>
+              </a:rPr>
+              <a:t>e adding the following keys in RB Tree: 10, 20, 30, 15, 25, 5, 1, 27</a:t>
+            </a:r>
+          </a:p>
+          <a:p>
+            <a:r>
+              <a:rPr lang="en-US" sz="1300" dirty="0">
+                <a:solidFill>
+                  <a:srgbClr val="595959"/>
+                </a:solidFill>
+                <a:latin typeface="Calibri"/>
+              </a:rPr>
+              <a:t>Practice adding the following keys in RB Tree:  50, 40, 30, 45, 47, 60, 70, 65</a:t>
+            </a:r>
+          </a:p>
           <a:p>
             <a:r>
               <a:rPr sz="1300" b="0" i="0" dirty="0">
